--- a/public/fun/pack/pptx/familypro/가족소개프리미엄_15_반려동물과함께_에메랄드브라스.pptx
+++ b/public/fun/pack/pptx/familypro/가족소개프리미엄_15_반려동물과함께_에메랄드브라스.pptx
@@ -113,12 +113,12 @@
   <p:extLst>
     <p:ext uri="{521415D9-36F7-43E2-AB2F-B90AF26B5E84}">
       <p14:sectionLst xmlns:p14="http://schemas.microsoft.com/office/powerpoint/2010/main">
-        <p14:section name="시작" id="{094674AB-789E-48DE-9D10-AE0A1BF2B715}">
+        <p14:section name="시작" id="{93EE4D73-1B5E-4D6C-ACF6-4F300D841319}">
           <p14:sldIdLst>
             <p14:sldId id="256"/>
           </p14:sldIdLst>
         </p14:section>
-        <p14:section name="본문" id="{6B156A84-DDDD-4441-B275-B3987891C8CF}">
+        <p14:section name="본문" id="{7244CE77-8F65-4FAD-A8A7-9B39740B0BB4}">
           <p14:sldIdLst>
             <p14:sldId id="257"/>
             <p14:sldId id="258"/>
@@ -127,7 +127,7 @@
             <p14:sldId id="261"/>
           </p14:sldIdLst>
         </p14:section>
-        <p14:section name="마무리" id="{041715E9-E42E-4DF1-BBD9-B28366D19CC6}">
+        <p14:section name="마무리" id="{5E384813-F7DC-4D23-99DE-4AFBAC93159C}">
           <p14:sldIdLst>
             <p14:sldId id="262"/>
           </p14:sldIdLst>
@@ -1548,7 +1548,7 @@
             </a:lvl1pPr>
           </a:lstStyle>
           <a:p>
-            <a:fld id="{B83B01BF-8D90-44DA-968C-09732BB385D4}" type="slidenum">
+            <a:fld id="{AB6D89FC-C21F-466E-90D5-1036602258F4}" type="slidenum">
               <a:rPr lang="en-US"/>
               <a:t>‹#›</a:t>
             </a:fld>
@@ -2259,7 +2259,7 @@
             </a:lvl1pPr>
           </a:lstStyle>
           <a:p>
-            <a:fld id="{413DB0AF-F210-49D6-872F-0C6229194499}" type="slidenum">
+            <a:fld id="{70DD8253-E524-4501-A670-3DDAC1A014B7}" type="slidenum">
               <a:rPr lang="en-US"/>
               <a:t>‹#›</a:t>
             </a:fld>
@@ -2943,7 +2943,7 @@
             </a:lvl1pPr>
           </a:lstStyle>
           <a:p>
-            <a:fld id="{91EEB89A-1107-4F29-AD03-1DDE811AB293}" type="slidenum">
+            <a:fld id="{C7F52157-515C-4ED5-A756-8EADA006F356}" type="slidenum">
               <a:rPr lang="en-US"/>
               <a:t>‹#›</a:t>
             </a:fld>
@@ -3810,7 +3810,7 @@
           <a:p>
             <a:r>
               <a:rPr lang="ko-KR"/>
-              <a:t>반려동물과 함께 · 0000. 00. 00</a:t>
+              <a:t>반려동물과 함께 · 날짜 입력</a:t>
             </a:r>
           </a:p>
         </p:txBody>
@@ -4099,7 +4099,7 @@
           <a:bodyPr/>
           <a:lstStyle/>
           <a:p>
-            <a:fld id="{DBF3FDDE-785C-49B1-887A-849A6A377D5B}" type="slidenum">
+            <a:fld id="{2238D3FD-266D-44F8-9A06-995604FAAF14}" type="slidenum">
               <a:rPr lang="en-US"/>
               <a:t>‹#›</a:t>
             </a:fld>
@@ -4655,7 +4655,7 @@
           <a:bodyPr/>
           <a:lstStyle/>
           <a:p>
-            <a:fld id="{6FA0CCD0-9A20-44A6-9A71-5E3DA19C3164}" type="slidenum">
+            <a:fld id="{3FF8A3A8-D7A9-4BD5-979A-59C37015B6E1}" type="slidenum">
               <a:rPr lang="en-US"/>
               <a:t>‹#›</a:t>
             </a:fld>
@@ -5497,7 +5497,7 @@
           <a:bodyPr/>
           <a:lstStyle/>
           <a:p>
-            <a:fld id="{07FA6158-69DC-40FD-9E84-F4A71789CAC7}" type="slidenum">
+            <a:fld id="{3AF1D03C-D26B-4781-BCBD-0DD0712B0B1E}" type="slidenum">
               <a:rPr lang="en-US"/>
               <a:t>‹#›</a:t>
             </a:fld>
@@ -6782,7 +6782,7 @@
           <a:bodyPr/>
           <a:lstStyle/>
           <a:p>
-            <a:fld id="{D82CA0DA-EA69-44C8-942D-8D2F797CE44B}" type="slidenum">
+            <a:fld id="{906DF1DA-8E38-4D05-B35B-D68856E3038E}" type="slidenum">
               <a:rPr lang="en-US"/>
               <a:t>‹#›</a:t>
             </a:fld>
@@ -6870,7 +6870,7 @@
           <a:bodyPr/>
           <a:lstStyle/>
           <a:p>
-            <a:fld id="{616BBDF3-5111-47BF-BA20-986E99743D5B}" type="slidenum">
+            <a:fld id="{4DD8EB37-F0B0-481C-8223-39AEFC34B9EA}" type="slidenum">
               <a:rPr lang="en-US"/>
               <a:t>‹#›</a:t>
             </a:fld>
